--- a/docs/training/scanner-training-es.pptx
+++ b/docs/training/scanner-training-es.pptx
@@ -140,26 +140,26 @@
   <p:extLst>
     <p:ext uri="{521415D9-36F7-43E2-AB2F-B90AF26B5E84}">
       <p14:sectionLst xmlns:p14="http://schemas.microsoft.com/office/powerpoint/2010/main">
-        <p14:section name="Inicio" id="{6f1bf099-5bbc-62b9-0ea7-e3b5a091520f}">
+        <p14:section name="Inicio" id="{1a8b7333-0cb7-0eb7-48de-fa5fba4dc579}">
           <p14:sldIdLst>
             <p14:sldId id="256"/>
           </p14:sldIdLst>
         </p14:section>
-        <p14:section name="Parte 1 · Antes de empezar" id="{816e53d5-80f3-9e50-6c63-1b74a3a74f59}">
+        <p14:section name="Parte 1 · Antes de empezar" id="{f8f76691-a0f2-23f8-020a-bc4349cef3b2}">
           <p14:sldIdLst>
             <p14:sldId id="257"/>
             <p14:sldId id="258"/>
             <p14:sldId id="259"/>
           </p14:sldIdLst>
         </p14:section>
-        <p14:section name="Parte 2 · Iniciar sesión" id="{1a0844ac-93ee-3b33-3dd5-3ae125f07e0a}">
+        <p14:section name="Parte 2 · Iniciar sesión" id="{412f4fe9-cd6c-95f3-6469-55c29a29f9a9}">
           <p14:sldIdLst>
             <p14:sldId id="260"/>
             <p14:sldId id="261"/>
             <p14:sldId id="262"/>
           </p14:sldIdLst>
         </p14:section>
-        <p14:section name="Parte 3 · Contar una tarima" id="{45de9c4a-e55f-08c5-0b81-12e92a64c6fc}">
+        <p14:section name="Parte 3 · Contar una tarima" id="{d9a07d5e-549a-8845-5e2f-66ef8cffba0a}">
           <p14:sldIdLst>
             <p14:sldId id="263"/>
             <p14:sldId id="264"/>
@@ -170,14 +170,14 @@
             <p14:sldId id="269"/>
           </p14:sldIdLst>
         </p14:section>
-        <p14:section name="Parte 4 · Cuando la ubicación es diferente" id="{9def6a2d-8de4-38db-d3df-9d0b8db28993}">
+        <p14:section name="Parte 4 · Cuando la ubicación es diferente" id="{ab6fb002-079b-31cc-aabe-e33a67147c9d}">
           <p14:sldIdLst>
             <p14:sldId id="270"/>
             <p14:sldId id="271"/>
             <p14:sldId id="272"/>
           </p14:sldIdLst>
         </p14:section>
-        <p14:section name="Parte 5 · Etiquetas" id="{8d54c27a-1f49-f7cf-4f06-6efa9766bb01}">
+        <p14:section name="Parte 5 · Etiquetas" id="{e4acf59c-03c7-5770-e1eb-8e1adcb9fcc3}">
           <p14:sldIdLst>
             <p14:sldId id="273"/>
             <p14:sldId id="274"/>
@@ -186,7 +186,7 @@
             <p14:sldId id="277"/>
           </p14:sldIdLst>
         </p14:section>
-        <p14:section name="Parte 6 · Ayuda y correcciones" id="{98d62626-c9ec-3e35-32b3-2a5d9a7e03f4}">
+        <p14:section name="Parte 6 · Ayuda y correcciones" id="{df8c8333-78f6-fa57-329e-f9abb31ff608}">
           <p14:sldIdLst>
             <p14:sldId id="278"/>
             <p14:sldId id="279"/>
@@ -196,14 +196,14 @@
             <p14:sldId id="283"/>
           </p14:sldIdLst>
         </p14:section>
-        <p14:section name="Parte 7 · Segundos conteos, y terminar" id="{fe5e526d-80e2-4141-9f05-8a22f69d31b8}">
+        <p14:section name="Parte 7 · Segundos conteos, y terminar" id="{f746af9c-d054-f02c-7650-ee7265a09a27}">
           <p14:sldIdLst>
             <p14:sldId id="284"/>
             <p14:sldId id="285"/>
             <p14:sldId id="286"/>
           </p14:sldIdLst>
         </p14:section>
-        <p14:section name="Las reglas" id="{66e855f1-e6f6-3636-37f6-84ba747b837e}">
+        <p14:section name="Las reglas" id="{b9ee12b3-b810-4769-444c-4615ab9d5a19}">
           <p14:sldIdLst>
             <p14:sldId id="287"/>
             <p14:sldId id="288"/>
@@ -614,7 +614,7 @@
           <a:p>
             <a:r>
               <a:rPr lang="en-US" dirty="0"/>
-              <a:t>Bienvenidos. Hoy aprenden el escáner. El trabajo son tres pasos, una y otra vez: escanear la etiqueta de la tarima, escribir cuántas cajas hay de verdad, escanear la etiqueta del rack. Todo lo demás es el escáner ayudándote cuando algo es diferente. El video muestra los mismos pasos despacio; estas láminas son la misma lección para conservar.</a:t>
+              <a:t>Bienvenidos. Hoy aprenden el escáner. El trabajo son tres pasos, una y otra vez: escanear la etiqueta del rack, escanear la etiqueta de la tarima, escribir cuántas cajas hay de verdad. Todo lo demás es el escáner ayudándote cuando algo es diferente. El video muestra los mismos pasos despacio; estas láminas son la misma lección para conservar.</a:t>
             </a:r>
             <a:endParaRPr lang="en-US" dirty="0"/>
           </a:p>
@@ -702,7 +702,7 @@
           <a:p>
             <a:r>
               <a:rPr lang="en-US" dirty="0"/>
-              <a:t>Muestra una etiqueta real de tarima. El código de barras es lo que lee el escáner. El escáner dice Tarima F01-001 y nada de lo que lleva: es a propósito.</a:t>
+              <a:t>Muestra una etiqueta de rack. Está en la viga debajo de la tarima. Escanea la del lugar que estás contando, no la de al lado.</a:t>
             </a:r>
             <a:endParaRPr lang="en-US" dirty="0"/>
           </a:p>
@@ -790,7 +790,7 @@
           <a:p>
             <a:r>
               <a:rPr lang="en-US" dirty="0"/>
-              <a:t>Este es el paso que importa. Si la tarima dice 48 y cuentas 45, escribe 45. La oficina resuelve el resto.</a:t>
+              <a:t>Muestra una etiqueta real de tarima. El código de barras es lo que lee el escáner. El escáner dice Tarima F01-001 y nada de lo que lleva: es a propósito.</a:t>
             </a:r>
             <a:endParaRPr lang="en-US" dirty="0"/>
           </a:p>
@@ -878,7 +878,7 @@
           <a:p>
             <a:r>
               <a:rPr lang="en-US" dirty="0"/>
-              <a:t>Muestra una etiqueta de rack. Está en la viga debajo de la tarima. Escanea la del lugar donde está la tarima, no la de al lado.</a:t>
+              <a:t>Este es el paso que importa. Si la tarima dice 48 y cuentas 45, escribe 45. La oficina resuelve el resto.</a:t>
             </a:r>
             <a:endParaRPr lang="en-US" dirty="0"/>
           </a:p>
@@ -1494,7 +1494,7 @@
           <a:p>
             <a:r>
               <a:rPr lang="en-US" dirty="0"/>
-              <a:t>Algunas tarimas llevan dos cargas, cada una con su etiqueta. Cada etiqueta lleva su propia cantidad. El rack se escanea una vez.</a:t>
+              <a:t>Algunas tarimas llevan dos cargas, cada una con su etiqueta. Cada etiqueta lleva su propia cantidad. El rack se escanea una vez, antes del botón.</a:t>
             </a:r>
             <a:endParaRPr lang="en-US" dirty="0"/>
           </a:p>
@@ -3430,7 +3430,7 @@
           <a:p>
             <a:r>
               <a:rPr lang="en-US" dirty="0"/>
-              <a:t>Tres pasos, una y otra vez: la tarima, la cantidad, el rack.</a:t>
+              <a:t>Tres pasos, una y otra vez: el rack, la tarima, la cantidad.</a:t>
             </a:r>
             <a:endParaRPr lang="en-US" dirty="0"/>
           </a:p>
@@ -4529,7 +4529,7 @@
                   <a:schemeClr val="bg2"/>
                 </a:solidFill>
               </a:rPr>
-              <a:t>Escanea la tarima. Escribe lo que hay. Escanea el rack.</a:t>
+              <a:t>Escanea el rack. Escanea la tarima. Escribe lo que hay.</a:t>
             </a:r>
             <a:endParaRPr lang="en-US" sz="2400" dirty="0"/>
           </a:p>
@@ -4644,7 +4644,7 @@
                   <a:schemeClr val="bg1"/>
                 </a:solidFill>
               </a:rPr>
-              <a:t>1 · Escanea la etiqueta de la tarima</a:t>
+              <a:t>1 · Escanea la etiqueta del rack</a:t>
             </a:r>
             <a:endParaRPr lang="en-US" sz="3200" dirty="0"/>
           </a:p>
@@ -4652,7 +4652,7 @@
       </p:sp>
       <p:pic>
         <p:nvPicPr>
-          <p:cNvPr id="4" name="screen pallet-scanned" descr="/tmp/claude-0/-home-user-physical-inv-app/306c8cb8-d35a-5682-9463-1e29ddfdbc42/scratchpad/wt-film/docs/training/shots/es/06-pallet-scanned.png">    </p:cNvPr>
+          <p:cNvPr id="4" name="screen rack-scanned" descr="/home/user/physical-inv-app/docs/training/shots/es/06-rack-scanned.png">    </p:cNvPr>
           <p:cNvPicPr>
             <a:picLocks noChangeAspect="1"/>
           </p:cNvPicPr>
@@ -4708,7 +4708,7 @@
                   <a:schemeClr val="bg2"/>
                 </a:solidFill>
               </a:rPr>
-              <a:t>Apunta el escáner al código de barras de la etiqueta de la tarima. Aprieta el gatillo. Espera el bip.</a:t>
+              <a:t>Apunta el escáner a la etiqueta amarilla del rack debajo de la tarima. Aprieta el gatillo. Espera el bip.</a:t>
             </a:r>
             <a:endParaRPr lang="en-US" sz="2200" dirty="0"/>
           </a:p>
@@ -4726,37 +4726,7 @@
                   <a:schemeClr val="bg2"/>
                 </a:solidFill>
               </a:rPr>
-              <a:t>El escáner muestra el número de tarima. </a:t>
-            </a:r>
-            <a:pPr algn="l" marL="228600" indent="-228600">
-              <a:spcAft>
-                <a:spcPts val="1000"/>
-              </a:spcAft>
-              <a:buSzPct val="100000"/>
-              <a:buChar char="•"/>
-            </a:pPr>
-            <a:r>
-              <a:rPr lang="en-US" sz="2200" b="1" dirty="0">
-                <a:solidFill>
-                  <a:schemeClr val="bg2"/>
-                </a:solidFill>
-              </a:rPr>
-              <a:t>No</a:t>
-            </a:r>
-            <a:pPr algn="l" marL="228600" indent="-228600">
-              <a:spcAft>
-                <a:spcPts val="1000"/>
-              </a:spcAft>
-              <a:buSzPct val="100000"/>
-              <a:buChar char="•"/>
-            </a:pPr>
-            <a:r>
-              <a:rPr lang="en-US" sz="2200" dirty="0">
-                <a:solidFill>
-                  <a:schemeClr val="bg2"/>
-                </a:solidFill>
-              </a:rPr>
-              <a:t> te dice cuántas cajas debería haber.</a:t>
+              <a:t>Así el sistema sabe dónde estás. El escáner revisa que sea de tu pasillo y tus niveles.</a:t>
             </a:r>
             <a:endParaRPr lang="en-US" sz="2200" dirty="0"/>
           </a:p>
@@ -4764,7 +4734,7 @@
       </p:sp>
       <p:pic>
         <p:nvPicPr>
-          <p:cNvPr id="6" name="label-pallet" descr="/tmp/claude-0/-home-user-physical-inv-app/306c8cb8-d35a-5682-9463-1e29ddfdbc42/scratchpad/wt-film/docs/training/shots/es/label-pallet.png">    </p:cNvPr>
+          <p:cNvPr id="6" name="label-rack" descr="/home/user/physical-inv-app/docs/training/shots/es/label-rack.png">    </p:cNvPr>
           <p:cNvPicPr>
             <a:picLocks noChangeAspect="1"/>
           </p:cNvPicPr>
@@ -4779,76 +4749,13 @@
         <p:spPr>
           <a:xfrm>
             <a:off x="548640" y="4526280"/>
-            <a:ext cx="2834640" cy="1188720"/>
+            <a:ext cx="2834640" cy="1243584"/>
           </a:xfrm>
           <a:prstGeom prst="rect">
             <a:avLst/>
           </a:prstGeom>
         </p:spPr>
       </p:pic>
-      <p:sp>
-        <p:nvSpPr>
-          <p:cNvPr id="7" name="tip box"/>
-          <p:cNvSpPr/>
-          <p:nvPr/>
-        </p:nvSpPr>
-        <p:spPr>
-          <a:xfrm>
-            <a:off x="548640" y="5715000"/>
-            <a:ext cx="6583680" cy="502920"/>
-          </a:xfrm>
-          <a:prstGeom prst="roundRect">
-            <a:avLst>
-              <a:gd name="adj" fmla="val 21818"/>
-            </a:avLst>
-          </a:prstGeom>
-          <a:solidFill>
-            <a:srgbClr val="18293F"/>
-          </a:solidFill>
-          <a:ln w="12700">
-            <a:solidFill>
-              <a:srgbClr val="FFC20E"/>
-            </a:solidFill>
-            <a:prstDash val="solid"/>
-          </a:ln>
-        </p:spPr>
-      </p:sp>
-      <p:sp>
-        <p:nvSpPr>
-          <p:cNvPr id="8" name="tip"/>
-          <p:cNvSpPr txBox="1"/>
-          <p:nvPr/>
-        </p:nvSpPr>
-        <p:spPr>
-          <a:xfrm>
-            <a:off x="713232" y="5715000"/>
-            <a:ext cx="6309360" cy="502920"/>
-          </a:xfrm>
-          <a:prstGeom prst="rect">
-            <a:avLst/>
-          </a:prstGeom>
-          <a:noFill/>
-          <a:ln/>
-        </p:spPr>
-        <p:txBody>
-          <a:bodyPr wrap="square" lIns="0" tIns="0" rIns="0" bIns="0" rtlCol="0" anchor="ctr"/>
-          <a:lstStyle/>
-          <a:p>
-            <a:pPr indent="0" marL="0">
-              <a:buNone/>
-            </a:pPr>
-            <a:r>
-              <a:rPr lang="en-US" sz="1600" b="1" dirty="0">
-                <a:solidFill>
-                  <a:schemeClr val="accent1"/>
-                </a:solidFill>
-              </a:rPr>
-              <a:t>Un conteo a ciegas: cuentas lo que tienes enfrente</a:t>
-            </a:r>
-            <a:endParaRPr lang="en-US" sz="1600" dirty="0"/>
-          </a:p>
-        </p:txBody>
-      </p:sp>
       <p:sp>
         <p:nvSpPr>
           <p:cNvPr id="25" name="Slide Number Placeholder 0"/>
@@ -4989,7 +4896,7 @@
                   <a:schemeClr val="bg1"/>
                 </a:solidFill>
               </a:rPr>
-              <a:t>2 · Cuenta y escribe la cantidad</a:t>
+              <a:t>2 · Escanea la etiqueta de la tarima</a:t>
             </a:r>
             <a:endParaRPr lang="en-US" sz="3200" dirty="0"/>
           </a:p>
@@ -4997,7 +4904,7 @@
       </p:sp>
       <p:pic>
         <p:nvPicPr>
-          <p:cNvPr id="4" name="screen quantity" descr="/tmp/claude-0/-home-user-physical-inv-app/306c8cb8-d35a-5682-9463-1e29ddfdbc42/scratchpad/wt-film/docs/training/shots/es/07-quantity.png">    </p:cNvPr>
+          <p:cNvPr id="4" name="screen pallet-scanned" descr="/home/user/physical-inv-app/docs/training/shots/es/07-pallet-scanned.png">    </p:cNvPr>
           <p:cNvPicPr>
             <a:picLocks noChangeAspect="1"/>
           </p:cNvPicPr>
@@ -5028,7 +4935,7 @@
         <p:spPr>
           <a:xfrm>
             <a:off x="548640" y="1691640"/>
-            <a:ext cx="7627289" cy="4206240"/>
+            <a:ext cx="7627289" cy="2651760"/>
           </a:xfrm>
           <a:prstGeom prst="rect">
             <a:avLst/>
@@ -5053,8 +4960,11 @@
                   <a:schemeClr val="bg2"/>
                 </a:solidFill>
               </a:rPr>
-              <a:t>Cuenta las cajas que </a:t>
-            </a:r>
+              <a:t>Ahora el código de barras de la etiqueta de la tarima. Espera el bip.</a:t>
+            </a:r>
+            <a:endParaRPr lang="en-US" sz="2200" dirty="0"/>
+          </a:p>
+          <a:p>
             <a:pPr algn="l" marL="228600" indent="-228600">
               <a:spcAft>
                 <a:spcPts val="1000"/>
@@ -5063,12 +4973,12 @@
               <a:buChar char="•"/>
             </a:pPr>
             <a:r>
-              <a:rPr lang="en-US" sz="2200" b="1" dirty="0">
-                <a:solidFill>
-                  <a:schemeClr val="bg2"/>
-                </a:solidFill>
-              </a:rPr>
-              <a:t>de verdad están ahí</a:t>
+              <a:rPr lang="en-US" sz="2200" dirty="0">
+                <a:solidFill>
+                  <a:schemeClr val="bg2"/>
+                </a:solidFill>
+              </a:rPr>
+              <a:t>El escáner muestra el número de tarima. </a:t>
             </a:r>
             <a:pPr algn="l" marL="228600" indent="-228600">
               <a:spcAft>
@@ -5078,16 +4988,13 @@
               <a:buChar char="•"/>
             </a:pPr>
             <a:r>
-              <a:rPr lang="en-US" sz="2200" dirty="0">
-                <a:solidFill>
-                  <a:schemeClr val="bg2"/>
-                </a:solidFill>
-              </a:rPr>
-              <a:t>.</a:t>
-            </a:r>
-            <a:endParaRPr lang="en-US" sz="2200" dirty="0"/>
-          </a:p>
-          <a:p>
+              <a:rPr lang="en-US" sz="2200" b="1" dirty="0">
+                <a:solidFill>
+                  <a:schemeClr val="bg2"/>
+                </a:solidFill>
+              </a:rPr>
+              <a:t>No</a:t>
+            </a:r>
             <a:pPr algn="l" marL="228600" indent="-228600">
               <a:spcAft>
                 <a:spcPts val="1000"/>
@@ -5101,42 +5008,96 @@
                   <a:schemeClr val="bg2"/>
                 </a:solidFill>
               </a:rPr>
-              <a:t>Escribe el número con las teclas y oprime Enter.</a:t>
+              <a:t> te dice cuántas cajas debería haber.</a:t>
             </a:r>
             <a:endParaRPr lang="en-US" sz="2200" dirty="0"/>
           </a:p>
-          <a:p>
-            <a:pPr algn="l" marL="228600" indent="-228600">
-              <a:spcAft>
-                <a:spcPts val="1000"/>
-              </a:spcAft>
-              <a:buSzPct val="100000"/>
-              <a:buChar char="•"/>
-            </a:pPr>
-            <a:r>
-              <a:rPr lang="en-US" sz="2200" b="1" dirty="0">
-                <a:solidFill>
-                  <a:schemeClr val="bg2"/>
-                </a:solidFill>
-              </a:rPr>
-              <a:t>Nunca</a:t>
-            </a:r>
-            <a:pPr algn="l" marL="228600" indent="-228600">
-              <a:spcAft>
-                <a:spcPts val="1000"/>
-              </a:spcAft>
-              <a:buSzPct val="100000"/>
-              <a:buChar char="•"/>
-            </a:pPr>
-            <a:r>
-              <a:rPr lang="en-US" sz="2200" dirty="0">
-                <a:solidFill>
-                  <a:schemeClr val="bg2"/>
-                </a:solidFill>
-              </a:rPr>
-              <a:t> escribas lo que crees que debería ser. Un número grande puede pedirse dos veces.</a:t>
-            </a:r>
-            <a:endParaRPr lang="en-US" sz="2200" dirty="0"/>
+        </p:txBody>
+      </p:sp>
+      <p:pic>
+        <p:nvPicPr>
+          <p:cNvPr id="6" name="label-pallet" descr="/home/user/physical-inv-app/docs/training/shots/es/label-pallet.png">    </p:cNvPr>
+          <p:cNvPicPr>
+            <a:picLocks noChangeAspect="1"/>
+          </p:cNvPicPr>
+          <p:nvPr/>
+        </p:nvPicPr>
+        <p:blipFill>
+          <a:blip r:embed="rId2"/>
+          <a:stretch>
+            <a:fillRect/>
+          </a:stretch>
+        </p:blipFill>
+        <p:spPr>
+          <a:xfrm>
+            <a:off x="548640" y="4526280"/>
+            <a:ext cx="2834640" cy="1188720"/>
+          </a:xfrm>
+          <a:prstGeom prst="rect">
+            <a:avLst/>
+          </a:prstGeom>
+        </p:spPr>
+      </p:pic>
+      <p:sp>
+        <p:nvSpPr>
+          <p:cNvPr id="7" name="tip box"/>
+          <p:cNvSpPr/>
+          <p:nvPr/>
+        </p:nvSpPr>
+        <p:spPr>
+          <a:xfrm>
+            <a:off x="548640" y="5715000"/>
+            <a:ext cx="6583680" cy="502920"/>
+          </a:xfrm>
+          <a:prstGeom prst="roundRect">
+            <a:avLst>
+              <a:gd name="adj" fmla="val 21818"/>
+            </a:avLst>
+          </a:prstGeom>
+          <a:solidFill>
+            <a:srgbClr val="18293F"/>
+          </a:solidFill>
+          <a:ln w="12700">
+            <a:solidFill>
+              <a:srgbClr val="FFC20E"/>
+            </a:solidFill>
+            <a:prstDash val="solid"/>
+          </a:ln>
+        </p:spPr>
+      </p:sp>
+      <p:sp>
+        <p:nvSpPr>
+          <p:cNvPr id="8" name="tip"/>
+          <p:cNvSpPr txBox="1"/>
+          <p:nvPr/>
+        </p:nvSpPr>
+        <p:spPr>
+          <a:xfrm>
+            <a:off x="713232" y="5715000"/>
+            <a:ext cx="6309360" cy="502920"/>
+          </a:xfrm>
+          <a:prstGeom prst="rect">
+            <a:avLst/>
+          </a:prstGeom>
+          <a:noFill/>
+          <a:ln/>
+        </p:spPr>
+        <p:txBody>
+          <a:bodyPr wrap="square" lIns="0" tIns="0" rIns="0" bIns="0" rtlCol="0" anchor="ctr"/>
+          <a:lstStyle/>
+          <a:p>
+            <a:pPr indent="0" marL="0">
+              <a:buNone/>
+            </a:pPr>
+            <a:r>
+              <a:rPr lang="en-US" sz="1600" b="1" dirty="0">
+                <a:solidFill>
+                  <a:schemeClr val="accent1"/>
+                </a:solidFill>
+              </a:rPr>
+              <a:t>Un conteo a ciegas: cuentas lo que tienes enfrente</a:t>
+            </a:r>
+            <a:endParaRPr lang="en-US" sz="1600" dirty="0"/>
           </a:p>
         </p:txBody>
       </p:sp>
@@ -5280,7 +5241,7 @@
                   <a:schemeClr val="bg1"/>
                 </a:solidFill>
               </a:rPr>
-              <a:t>3 · Escanea la etiqueta del rack</a:t>
+              <a:t>3 · Cuenta y escribe la cantidad</a:t>
             </a:r>
             <a:endParaRPr lang="en-US" sz="3200" dirty="0"/>
           </a:p>
@@ -5288,7 +5249,7 @@
       </p:sp>
       <p:pic>
         <p:nvPicPr>
-          <p:cNvPr id="4" name="screen bin-asked" descr="/tmp/claude-0/-home-user-physical-inv-app/306c8cb8-d35a-5682-9463-1e29ddfdbc42/scratchpad/wt-film/docs/training/shots/es/08-bin-asked.png">    </p:cNvPr>
+          <p:cNvPr id="4" name="screen quantity" descr="/home/user/physical-inv-app/docs/training/shots/es/08-quantity.png">    </p:cNvPr>
           <p:cNvPicPr>
             <a:picLocks noChangeAspect="1"/>
           </p:cNvPicPr>
@@ -5319,7 +5280,7 @@
         <p:spPr>
           <a:xfrm>
             <a:off x="548640" y="1691640"/>
-            <a:ext cx="7627289" cy="2651760"/>
+            <a:ext cx="7627289" cy="4206240"/>
           </a:xfrm>
           <a:prstGeom prst="rect">
             <a:avLst/>
@@ -5344,11 +5305,8 @@
                   <a:schemeClr val="bg2"/>
                 </a:solidFill>
               </a:rPr>
-              <a:t>Escanea la etiqueta amarilla del rack donde está la tarima.</a:t>
-            </a:r>
-            <a:endParaRPr lang="en-US" sz="2200" dirty="0"/>
-          </a:p>
-          <a:p>
+              <a:t>Cuenta las cajas que </a:t>
+            </a:r>
             <a:pPr algn="l" marL="228600" indent="-228600">
               <a:spcAft>
                 <a:spcPts val="1000"/>
@@ -5357,16 +5315,13 @@
               <a:buChar char="•"/>
             </a:pPr>
             <a:r>
-              <a:rPr lang="en-US" sz="2200" dirty="0">
-                <a:solidFill>
-                  <a:schemeClr val="bg2"/>
-                </a:solidFill>
-              </a:rPr>
-              <a:t>Así el sistema sabe dónde está la tarima.</a:t>
-            </a:r>
-            <a:endParaRPr lang="en-US" sz="2200" dirty="0"/>
-          </a:p>
-          <a:p>
+              <a:rPr lang="en-US" sz="2200" b="1" dirty="0">
+                <a:solidFill>
+                  <a:schemeClr val="bg2"/>
+                </a:solidFill>
+              </a:rPr>
+              <a:t>de verdad están ahí</a:t>
+            </a:r>
             <a:pPr algn="l" marL="228600" indent="-228600">
               <a:spcAft>
                 <a:spcPts val="1000"/>
@@ -5380,36 +5335,63 @@
                   <a:schemeClr val="bg2"/>
                 </a:solidFill>
               </a:rPr>
-              <a:t>El escáner revisa que sea de tu pasillo y tus niveles.</a:t>
+              <a:t>.</a:t>
             </a:r>
             <a:endParaRPr lang="en-US" sz="2200" dirty="0"/>
           </a:p>
-        </p:txBody>
-      </p:sp>
-      <p:pic>
-        <p:nvPicPr>
-          <p:cNvPr id="6" name="label-rack" descr="/tmp/claude-0/-home-user-physical-inv-app/306c8cb8-d35a-5682-9463-1e29ddfdbc42/scratchpad/wt-film/docs/training/shots/es/label-rack.png">    </p:cNvPr>
-          <p:cNvPicPr>
-            <a:picLocks noChangeAspect="1"/>
-          </p:cNvPicPr>
-          <p:nvPr/>
-        </p:nvPicPr>
-        <p:blipFill>
-          <a:blip r:embed="rId2"/>
-          <a:stretch>
-            <a:fillRect/>
-          </a:stretch>
-        </p:blipFill>
-        <p:spPr>
-          <a:xfrm>
-            <a:off x="548640" y="4526280"/>
-            <a:ext cx="2834640" cy="1243584"/>
-          </a:xfrm>
-          <a:prstGeom prst="rect">
-            <a:avLst/>
-          </a:prstGeom>
-        </p:spPr>
-      </p:pic>
+          <a:p>
+            <a:pPr algn="l" marL="228600" indent="-228600">
+              <a:spcAft>
+                <a:spcPts val="1000"/>
+              </a:spcAft>
+              <a:buSzPct val="100000"/>
+              <a:buChar char="•"/>
+            </a:pPr>
+            <a:r>
+              <a:rPr lang="en-US" sz="2200" dirty="0">
+                <a:solidFill>
+                  <a:schemeClr val="bg2"/>
+                </a:solidFill>
+              </a:rPr>
+              <a:t>Escribe el número con las teclas y oprime Enter.</a:t>
+            </a:r>
+            <a:endParaRPr lang="en-US" sz="2200" dirty="0"/>
+          </a:p>
+          <a:p>
+            <a:pPr algn="l" marL="228600" indent="-228600">
+              <a:spcAft>
+                <a:spcPts val="1000"/>
+              </a:spcAft>
+              <a:buSzPct val="100000"/>
+              <a:buChar char="•"/>
+            </a:pPr>
+            <a:r>
+              <a:rPr lang="en-US" sz="2200" b="1" dirty="0">
+                <a:solidFill>
+                  <a:schemeClr val="bg2"/>
+                </a:solidFill>
+              </a:rPr>
+              <a:t>Nunca</a:t>
+            </a:r>
+            <a:pPr algn="l" marL="228600" indent="-228600">
+              <a:spcAft>
+                <a:spcPts val="1000"/>
+              </a:spcAft>
+              <a:buSzPct val="100000"/>
+              <a:buChar char="•"/>
+            </a:pPr>
+            <a:r>
+              <a:rPr lang="en-US" sz="2200" dirty="0">
+                <a:solidFill>
+                  <a:schemeClr val="bg2"/>
+                </a:solidFill>
+              </a:rPr>
+              <a:t> escribas lo que crees que debería ser. Un número grande puede pedirse dos veces.</a:t>
+            </a:r>
+            <a:endParaRPr lang="en-US" sz="2200" dirty="0"/>
+          </a:p>
+        </p:txBody>
+      </p:sp>
       <p:sp>
         <p:nvSpPr>
           <p:cNvPr id="25" name="Slide Number Placeholder 0"/>
@@ -5558,7 +5540,7 @@
       </p:sp>
       <p:pic>
         <p:nvPicPr>
-          <p:cNvPr id="4" name="screen comments" descr="/tmp/claude-0/-home-user-physical-inv-app/306c8cb8-d35a-5682-9463-1e29ddfdbc42/scratchpad/wt-film/docs/training/shots/es/09-comments.png">    </p:cNvPr>
+          <p:cNvPr id="4" name="screen comments" descr="/home/user/physical-inv-app/docs/training/shots/es/09-comments.png">    </p:cNvPr>
           <p:cNvPicPr>
             <a:picLocks noChangeAspect="1"/>
           </p:cNvPicPr>
@@ -5897,7 +5879,7 @@
       </p:sp>
       <p:pic>
         <p:nvPicPr>
-          <p:cNvPr id="4" name="screen wrong-label" descr="/tmp/claude-0/-home-user-physical-inv-app/306c8cb8-d35a-5682-9463-1e29ddfdbc42/scratchpad/wt-film/docs/training/shots/es/10-wrong-label.png">    </p:cNvPr>
+          <p:cNvPr id="4" name="screen wrong-label" descr="/home/user/physical-inv-app/docs/training/shots/es/10-wrong-label.png">    </p:cNvPr>
           <p:cNvPicPr>
             <a:picLocks noChangeAspect="1"/>
           </p:cNvPicPr>
@@ -5953,7 +5935,7 @@
                   <a:schemeClr val="bg2"/>
                 </a:solidFill>
               </a:rPr>
-              <a:t>Si escaneas la etiqueta del rack cuando pide la tarima, el escáner te avisa y no guarda nada.</a:t>
+              <a:t>Si escaneas la etiqueta de la tarima cuando pide el rack, el escáner te avisa y no guarda nada.</a:t>
             </a:r>
             <a:endParaRPr lang="en-US" sz="2200" dirty="0"/>
           </a:p>
@@ -6264,7 +6246,7 @@
       </p:sp>
       <p:pic>
         <p:nvPicPr>
-          <p:cNvPr id="4" name="screen still-in-bin" descr="/tmp/claude-0/-home-user-physical-inv-app/306c8cb8-d35a-5682-9463-1e29ddfdbc42/scratchpad/wt-film/docs/training/shots/es/11-still-in-bin.png">    </p:cNvPr>
+          <p:cNvPr id="4" name="screen still-in-bin" descr="/home/user/physical-inv-app/docs/training/shots/es/11-still-in-bin.png">    </p:cNvPr>
           <p:cNvPicPr>
             <a:picLocks noChangeAspect="1"/>
           </p:cNvPicPr>
@@ -6633,7 +6615,7 @@
       </p:sp>
       <p:pic>
         <p:nvPicPr>
-          <p:cNvPr id="4" name="screen empty-button" descr="/tmp/claude-0/-home-user-physical-inv-app/306c8cb8-d35a-5682-9463-1e29ddfdbc42/scratchpad/wt-film/docs/training/shots/es/12-empty-button.png">    </p:cNvPr>
+          <p:cNvPr id="4" name="screen empty-button" descr="/home/user/physical-inv-app/docs/training/shots/es/12-empty-button.png">    </p:cNvPr>
           <p:cNvPicPr>
             <a:picLocks noChangeAspect="1"/>
           </p:cNvPicPr>
@@ -6689,7 +6671,7 @@
                   <a:schemeClr val="bg2"/>
                 </a:solidFill>
               </a:rPr>
-              <a:t>¿No hay nada en el lugar? Eso también cuenta.</a:t>
+              <a:t>¿No hay nada en el lugar? Eso también cuenta. Escanea la etiqueta del rack como siempre.</a:t>
             </a:r>
             <a:endParaRPr lang="en-US" sz="2200" dirty="0"/>
           </a:p>
@@ -6707,7 +6689,7 @@
                   <a:schemeClr val="bg2"/>
                 </a:solidFill>
               </a:rPr>
-              <a:t>Toca </a:t>
+              <a:t>Luego toca </a:t>
             </a:r>
             <a:pPr algn="l" marL="228600" indent="-228600">
               <a:spcAft>
@@ -6722,7 +6704,7 @@
                   <a:schemeClr val="bg2"/>
                 </a:solidFill>
               </a:rPr>
-              <a:t>Ubicación VACÍA — escanea la ubicación</a:t>
+              <a:t>Ubicación VACÍA</a:t>
             </a:r>
             <a:pPr algn="l" marL="228600" indent="-228600">
               <a:spcAft>
@@ -6737,11 +6719,8 @@
                   <a:schemeClr val="bg2"/>
                 </a:solidFill>
               </a:rPr>
-              <a:t> y luego escanea la etiqueta del rack.</a:t>
-            </a:r>
-            <a:endParaRPr lang="en-US" sz="2200" dirty="0"/>
-          </a:p>
-          <a:p>
+              <a:t> y </a:t>
+            </a:r>
             <a:pPr algn="l" marL="228600" indent="-228600">
               <a:spcAft>
                 <a:spcPts val="1000"/>
@@ -6750,6 +6729,39 @@
               <a:buChar char="•"/>
             </a:pPr>
             <a:r>
+              <a:rPr lang="en-US" sz="2200" b="1" dirty="0">
+                <a:solidFill>
+                  <a:schemeClr val="bg2"/>
+                </a:solidFill>
+              </a:rPr>
+              <a:t>Sí — está vacía</a:t>
+            </a:r>
+            <a:pPr algn="l" marL="228600" indent="-228600">
+              <a:spcAft>
+                <a:spcPts val="1000"/>
+              </a:spcAft>
+              <a:buSzPct val="100000"/>
+              <a:buChar char="•"/>
+            </a:pPr>
+            <a:r>
+              <a:rPr lang="en-US" sz="2200" dirty="0">
+                <a:solidFill>
+                  <a:schemeClr val="bg2"/>
+                </a:solidFill>
+              </a:rPr>
+              <a:t>.</a:t>
+            </a:r>
+            <a:endParaRPr lang="en-US" sz="2200" dirty="0"/>
+          </a:p>
+          <a:p>
+            <a:pPr algn="l" marL="228600" indent="-228600">
+              <a:spcAft>
+                <a:spcPts val="1000"/>
+              </a:spcAft>
+              <a:buSzPct val="100000"/>
+              <a:buChar char="•"/>
+            </a:pPr>
+            <a:r>
               <a:rPr lang="en-US" sz="2200" dirty="0">
                 <a:solidFill>
                   <a:schemeClr val="bg2"/>
@@ -6763,7 +6775,7 @@
       </p:sp>
       <p:pic>
         <p:nvPicPr>
-          <p:cNvPr id="6" name="label-rack" descr="/tmp/claude-0/-home-user-physical-inv-app/306c8cb8-d35a-5682-9463-1e29ddfdbc42/scratchpad/wt-film/docs/training/shots/es/label-rack.png">    </p:cNvPr>
+          <p:cNvPr id="6" name="label-rack" descr="/home/user/physical-inv-app/docs/training/shots/es/label-rack.png">    </p:cNvPr>
           <p:cNvPicPr>
             <a:picLocks noChangeAspect="1"/>
           </p:cNvPicPr>
@@ -7072,7 +7084,7 @@
       </p:sp>
       <p:pic>
         <p:nvPicPr>
-          <p:cNvPr id="4" name="screen multi-label-button" descr="/tmp/claude-0/-home-user-physical-inv-app/306c8cb8-d35a-5682-9463-1e29ddfdbc42/scratchpad/wt-film/docs/training/shots/es/13-multi-label-button.png">    </p:cNvPr>
+          <p:cNvPr id="4" name="screen multi-label-button" descr="/home/user/physical-inv-app/docs/training/shots/es/13-multi-label-button.png">    </p:cNvPr>
           <p:cNvPicPr>
             <a:picLocks noChangeAspect="1"/>
           </p:cNvPicPr>
@@ -7096,7 +7108,7 @@
       </p:pic>
       <p:pic>
         <p:nvPicPr>
-          <p:cNvPr id="5" name="screen multi-label-2" descr="/tmp/claude-0/-home-user-physical-inv-app/306c8cb8-d35a-5682-9463-1e29ddfdbc42/scratchpad/wt-film/docs/training/shots/es/14-multi-label-2.png">    </p:cNvPr>
+          <p:cNvPr id="5" name="screen multi-label-2" descr="/home/user/physical-inv-app/docs/training/shots/es/14-multi-label-2.png">    </p:cNvPr>
           <p:cNvPicPr>
             <a:picLocks noChangeAspect="1"/>
           </p:cNvPicPr>
@@ -7120,7 +7132,7 @@
       </p:pic>
       <p:pic>
         <p:nvPicPr>
-          <p:cNvPr id="6" name="screen multi-label-done" descr="/tmp/claude-0/-home-user-physical-inv-app/306c8cb8-d35a-5682-9463-1e29ddfdbc42/scratchpad/wt-film/docs/training/shots/es/15-multi-label-done.png">    </p:cNvPr>
+          <p:cNvPr id="6" name="screen multi-label-done" descr="/home/user/physical-inv-app/docs/training/shots/es/15-multi-label-done.png">    </p:cNvPr>
           <p:cNvPicPr>
             <a:picLocks noChangeAspect="1"/>
           </p:cNvPicPr>
@@ -7175,7 +7187,7 @@
                   <a:schemeClr val="bg2"/>
                 </a:solidFill>
               </a:rPr>
-              <a:t>Toca </a:t>
+              <a:t>Escanea el rack como siempre · toca </a:t>
             </a:r>
             <a:pPr algn="l" indent="0" marL="0">
               <a:spcAft>
@@ -7203,7 +7215,7 @@
                   <a:schemeClr val="bg2"/>
                 </a:solidFill>
               </a:rPr>
-              <a:t> · escanea el rack una vez · etiqueta 1 y sus cajas · etiqueta 2 y sus cajas · </a:t>
+              <a:t> · etiqueta 1 y sus cajas · etiqueta 2 y sus cajas · </a:t>
             </a:r>
             <a:pPr algn="l" indent="0" marL="0">
               <a:spcAft>
@@ -7510,7 +7522,7 @@
       </p:sp>
       <p:pic>
         <p:nvPicPr>
-          <p:cNvPr id="4" name="screen same-label-button" descr="/tmp/claude-0/-home-user-physical-inv-app/306c8cb8-d35a-5682-9463-1e29ddfdbc42/scratchpad/wt-film/docs/training/shots/es/16-same-label-button.png">    </p:cNvPr>
+          <p:cNvPr id="4" name="screen same-label-button" descr="/home/user/physical-inv-app/docs/training/shots/es/16-same-label-button.png">    </p:cNvPr>
           <p:cNvPicPr>
             <a:picLocks noChangeAspect="1"/>
           </p:cNvPicPr>
@@ -7816,7 +7828,7 @@
       </p:sp>
       <p:pic>
         <p:nvPicPr>
-          <p:cNvPr id="4" name="screen no-scan" descr="/tmp/claude-0/-home-user-physical-inv-app/306c8cb8-d35a-5682-9463-1e29ddfdbc42/scratchpad/wt-film/docs/training/shots/es/17-no-scan.png">    </p:cNvPr>
+          <p:cNvPr id="4" name="screen no-scan" descr="/home/user/physical-inv-app/docs/training/shots/es/17-no-scan.png">    </p:cNvPr>
           <p:cNvPicPr>
             <a:picLocks noChangeAspect="1"/>
           </p:cNvPicPr>
@@ -8200,7 +8212,7 @@
       </p:sp>
       <p:pic>
         <p:nvPicPr>
-          <p:cNvPr id="4" name="screen not-on-list" descr="/tmp/claude-0/-home-user-physical-inv-app/306c8cb8-d35a-5682-9463-1e29ddfdbc42/scratchpad/wt-film/docs/training/shots/es/18-not-on-list.png">    </p:cNvPr>
+          <p:cNvPr id="4" name="screen not-on-list" descr="/home/user/physical-inv-app/docs/training/shots/es/18-not-on-list.png">    </p:cNvPr>
           <p:cNvPicPr>
             <a:picLocks noChangeAspect="1"/>
           </p:cNvPicPr>
@@ -8783,7 +8795,7 @@
       </p:sp>
       <p:pic>
         <p:nvPicPr>
-          <p:cNvPr id="4" name="screen history" descr="/tmp/claude-0/-home-user-physical-inv-app/306c8cb8-d35a-5682-9463-1e29ddfdbc42/scratchpad/wt-film/docs/training/shots/es/19-history.png">    </p:cNvPr>
+          <p:cNvPr id="4" name="screen history" descr="/home/user/physical-inv-app/docs/training/shots/es/19-history.png">    </p:cNvPr>
           <p:cNvPicPr>
             <a:picLocks noChangeAspect="1"/>
           </p:cNvPicPr>
@@ -9101,7 +9113,7 @@
       </p:sp>
       <p:pic>
         <p:nvPicPr>
-          <p:cNvPr id="4" name="screen message" descr="/tmp/claude-0/-home-user-physical-inv-app/306c8cb8-d35a-5682-9463-1e29ddfdbc42/scratchpad/wt-film/docs/training/shots/es/20-message.png">    </p:cNvPr>
+          <p:cNvPr id="4" name="screen message" descr="/home/user/physical-inv-app/docs/training/shots/es/20-message.png">    </p:cNvPr>
           <p:cNvPicPr>
             <a:picLocks noChangeAspect="1"/>
           </p:cNvPicPr>
@@ -9359,7 +9371,7 @@
       </p:sp>
       <p:pic>
         <p:nvPicPr>
-          <p:cNvPr id="4" name="screen offline" descr="/tmp/claude-0/-home-user-physical-inv-app/306c8cb8-d35a-5682-9463-1e29ddfdbc42/scratchpad/wt-film/docs/training/shots/es/21-offline.png">    </p:cNvPr>
+          <p:cNvPr id="4" name="screen offline" descr="/home/user/physical-inv-app/docs/training/shots/es/21-offline.png">    </p:cNvPr>
           <p:cNvPicPr>
             <a:picLocks noChangeAspect="1"/>
           </p:cNvPicPr>
@@ -9713,7 +9725,7 @@
       </p:sp>
       <p:pic>
         <p:nvPicPr>
-          <p:cNvPr id="4" name="screen report-problem" descr="/tmp/claude-0/-home-user-physical-inv-app/306c8cb8-d35a-5682-9463-1e29ddfdbc42/scratchpad/wt-film/docs/training/shots/es/22-report-problem.png">    </p:cNvPr>
+          <p:cNvPr id="4" name="screen report-problem" descr="/home/user/physical-inv-app/docs/training/shots/es/22-report-problem.png">    </p:cNvPr>
           <p:cNvPicPr>
             <a:picLocks noChangeAspect="1"/>
           </p:cNvPicPr>
@@ -10019,7 +10031,7 @@
       </p:sp>
       <p:pic>
         <p:nvPicPr>
-          <p:cNvPr id="4" name="screen sos-list" descr="/tmp/claude-0/-home-user-physical-inv-app/306c8cb8-d35a-5682-9463-1e29ddfdbc42/scratchpad/wt-film/docs/training/shots/es/23-sos-list.png">    </p:cNvPr>
+          <p:cNvPr id="4" name="screen sos-list" descr="/home/user/physical-inv-app/docs/training/shots/es/23-sos-list.png">    </p:cNvPr>
           <p:cNvPicPr>
             <a:picLocks noChangeAspect="1"/>
           </p:cNvPicPr>
@@ -10043,7 +10055,7 @@
       </p:pic>
       <p:pic>
         <p:nvPicPr>
-          <p:cNvPr id="5" name="screen sos-seen" descr="/tmp/claude-0/-home-user-physical-inv-app/306c8cb8-d35a-5682-9463-1e29ddfdbc42/scratchpad/wt-film/docs/training/shots/es/24-sos-seen.png">    </p:cNvPr>
+          <p:cNvPr id="5" name="screen sos-seen" descr="/home/user/physical-inv-app/docs/training/shots/es/24-sos-seen.png">    </p:cNvPr>
           <p:cNvPicPr>
             <a:picLocks noChangeAspect="1"/>
           </p:cNvPicPr>
@@ -10521,7 +10533,7 @@
       </p:sp>
       <p:pic>
         <p:nvPicPr>
-          <p:cNvPr id="4" name="screen signon" descr="/tmp/claude-0/-home-user-physical-inv-app/306c8cb8-d35a-5682-9463-1e29ddfdbc42/scratchpad/wt-film/docs/training/shots/es/01-signon.png">    </p:cNvPr>
+          <p:cNvPr id="4" name="screen signon" descr="/home/user/physical-inv-app/docs/training/shots/es/01-signon.png">    </p:cNvPr>
           <p:cNvPicPr>
             <a:picLocks noChangeAspect="1"/>
           </p:cNvPicPr>
@@ -10721,7 +10733,7 @@
                   <a:schemeClr val="accent1"/>
                 </a:solidFill>
               </a:rPr>
-              <a:t>Tarima · Cantidad · Rack — una y otra vez</a:t>
+              <a:t>Rack · Tarima · Cantidad — una y otra vez</a:t>
             </a:r>
             <a:endParaRPr lang="en-US" sz="1600" dirty="0"/>
           </a:p>
@@ -10875,7 +10887,7 @@
       </p:sp>
       <p:pic>
         <p:nvPicPr>
-          <p:cNvPr id="4" name="screen second-counts-offered" descr="/tmp/claude-0/-home-user-physical-inv-app/306c8cb8-d35a-5682-9463-1e29ddfdbc42/scratchpad/wt-film/docs/training/shots/es/25-second-counts-offered.png">    </p:cNvPr>
+          <p:cNvPr id="4" name="screen second-counts-offered" descr="/home/user/physical-inv-app/docs/training/shots/es/25-second-counts-offered.png">    </p:cNvPr>
           <p:cNvPicPr>
             <a:picLocks noChangeAspect="1"/>
           </p:cNvPicPr>
@@ -10899,7 +10911,7 @@
       </p:pic>
       <p:pic>
         <p:nvPicPr>
-          <p:cNvPr id="5" name="screen second-count" descr="/tmp/claude-0/-home-user-physical-inv-app/306c8cb8-d35a-5682-9463-1e29ddfdbc42/scratchpad/wt-film/docs/training/shots/es/26-second-count.png">    </p:cNvPr>
+          <p:cNvPr id="5" name="screen second-count" descr="/home/user/physical-inv-app/docs/training/shots/es/26-second-count.png">    </p:cNvPr>
           <p:cNvPicPr>
             <a:picLocks noChangeAspect="1"/>
           </p:cNvPicPr>
@@ -11051,7 +11063,7 @@
                   <a:schemeClr val="bg2"/>
                 </a:solidFill>
               </a:rPr>
-              <a:t>Ve al lugar y cuenta todo — tarima, cantidad, rack. Luego toca </a:t>
+              <a:t>Ve al lugar y cuenta todo — rack, tarima, cantidad. Luego toca </a:t>
             </a:r>
             <a:pPr algn="l" marL="228600" indent="-228600">
               <a:spcAft>
@@ -11298,7 +11310,7 @@
       </p:sp>
       <p:pic>
         <p:nvPicPr>
-          <p:cNvPr id="4" name="screen aisle-complete" descr="/tmp/claude-0/-home-user-physical-inv-app/306c8cb8-d35a-5682-9463-1e29ddfdbc42/scratchpad/wt-film/docs/training/shots/es/27-aisle-complete.png">    </p:cNvPr>
+          <p:cNvPr id="4" name="screen aisle-complete" descr="/home/user/physical-inv-app/docs/training/shots/es/27-aisle-complete.png">    </p:cNvPr>
           <p:cNvPicPr>
             <a:picLocks noChangeAspect="1"/>
           </p:cNvPicPr>
@@ -11322,7 +11334,7 @@
       </p:pic>
       <p:pic>
         <p:nvPicPr>
-          <p:cNvPr id="5" name="screen next-aisle" descr="/tmp/claude-0/-home-user-physical-inv-app/306c8cb8-d35a-5682-9463-1e29ddfdbc42/scratchpad/wt-film/docs/training/shots/es/28-next-aisle.png">    </p:cNvPr>
+          <p:cNvPr id="5" name="screen next-aisle" descr="/home/user/physical-inv-app/docs/training/shots/es/28-next-aisle.png">    </p:cNvPr>
           <p:cNvPicPr>
             <a:picLocks noChangeAspect="1"/>
           </p:cNvPicPr>
@@ -11640,7 +11652,7 @@
       </p:sp>
       <p:pic>
         <p:nvPicPr>
-          <p:cNvPr id="4" name="screen next-bin" descr="/tmp/claude-0/-home-user-physical-inv-app/306c8cb8-d35a-5682-9463-1e29ddfdbc42/scratchpad/wt-film/docs/training/shots/es/05-next-bin.png">    </p:cNvPr>
+          <p:cNvPr id="4" name="screen next-bin" descr="/home/user/physical-inv-app/docs/training/shots/es/05-next-bin.png">    </p:cNvPr>
           <p:cNvPicPr>
             <a:picLocks noChangeAspect="1"/>
           </p:cNvPicPr>
@@ -12083,7 +12095,7 @@
                           <a:ea typeface="+mn-lt" pitchFamily="34" charset="-122"/>
                           <a:cs typeface="+mn-lt" pitchFamily="34" charset="-120"/>
                         </a:rPr>
-                        <a:t>No hay nada en el lugar. Luego escanea el rack</a:t>
+                        <a:t>No hay nada en el lugar: después del rack, tócalo y luego Sí</a:t>
                       </a:r>
                       <a:endParaRPr lang="en-US" sz="1400" dirty="0">
                         <a:latin typeface="+mn-lt" charset="0"/>
@@ -12359,7 +12371,7 @@
                           <a:ea typeface="+mn-lt" pitchFamily="34" charset="-122"/>
                           <a:cs typeface="+mn-lt" pitchFamily="34" charset="-120"/>
                         </a:rPr>
-                        <a:t>Rack una vez, luego cada etiqueta con sus cajas, luego Listo</a:t>
+                        <a:t>Después del rack: cada etiqueta con sus cajas, luego Listo</a:t>
                       </a:r>
                       <a:endParaRPr lang="en-US" sz="1400" dirty="0">
                         <a:latin typeface="+mn-lt" charset="0"/>
@@ -13797,7 +13809,7 @@
                   <a:schemeClr val="bg1"/>
                 </a:solidFill>
               </a:rPr>
-              <a:t>Tarima · Cantidad · Rack</a:t>
+              <a:t>Rack · Tarima · Cantidad</a:t>
             </a:r>
             <a:endParaRPr lang="en-US" sz="5400" dirty="0"/>
           </a:p>
@@ -13958,7 +13970,7 @@
       </p:sp>
       <p:pic>
         <p:nvPicPr>
-          <p:cNvPr id="4" name="screen signon-es" descr="/tmp/claude-0/-home-user-physical-inv-app/306c8cb8-d35a-5682-9463-1e29ddfdbc42/scratchpad/wt-film/docs/training/shots/es/02-signon-es.png">    </p:cNvPr>
+          <p:cNvPr id="4" name="screen signon-es" descr="/home/user/physical-inv-app/docs/training/shots/es/02-signon-es.png">    </p:cNvPr>
           <p:cNvPicPr>
             <a:picLocks noChangeAspect="1"/>
           </p:cNvPicPr>
@@ -14373,7 +14385,7 @@
       </p:sp>
       <p:pic>
         <p:nvPicPr>
-          <p:cNvPr id="4" name="screen signon-filled" descr="/tmp/claude-0/-home-user-physical-inv-app/306c8cb8-d35a-5682-9463-1e29ddfdbc42/scratchpad/wt-film/docs/training/shots/es/03-signon-filled.png">    </p:cNvPr>
+          <p:cNvPr id="4" name="screen signon-filled" descr="/home/user/physical-inv-app/docs/training/shots/es/03-signon-filled.png">    </p:cNvPr>
           <p:cNvPicPr>
             <a:picLocks noChangeAspect="1"/>
           </p:cNvPicPr>
@@ -14608,7 +14620,7 @@
       </p:sp>
       <p:pic>
         <p:nvPicPr>
-          <p:cNvPr id="6" name="label-team" descr="/tmp/claude-0/-home-user-physical-inv-app/306c8cb8-d35a-5682-9463-1e29ddfdbc42/scratchpad/wt-film/docs/training/shots/es/label-team.png">    </p:cNvPr>
+          <p:cNvPr id="6" name="label-team" descr="/home/user/physical-inv-app/docs/training/shots/es/label-team.png">    </p:cNvPr>
           <p:cNvPicPr>
             <a:picLocks noChangeAspect="1"/>
           </p:cNvPicPr>
@@ -14632,7 +14644,7 @@
       </p:pic>
       <p:pic>
         <p:nvPicPr>
-          <p:cNvPr id="7" name="label-badge" descr="/tmp/claude-0/-home-user-physical-inv-app/306c8cb8-d35a-5682-9463-1e29ddfdbc42/scratchpad/wt-film/docs/training/shots/es/label-badge.png">    </p:cNvPr>
+          <p:cNvPr id="7" name="label-badge" descr="/home/user/physical-inv-app/docs/training/shots/es/label-badge.png">    </p:cNvPr>
           <p:cNvPicPr>
             <a:picLocks noChangeAspect="1"/>
           </p:cNvPicPr>
@@ -14802,7 +14814,7 @@
       </p:sp>
       <p:pic>
         <p:nvPicPr>
-          <p:cNvPr id="4" name="screen your-aisle" descr="/tmp/claude-0/-home-user-physical-inv-app/306c8cb8-d35a-5682-9463-1e29ddfdbc42/scratchpad/wt-film/docs/training/shots/es/04-your-aisle.png">    </p:cNvPr>
+          <p:cNvPr id="4" name="screen your-aisle" descr="/home/user/physical-inv-app/docs/training/shots/es/04-your-aisle.png">    </p:cNvPr>
           <p:cNvPicPr>
             <a:picLocks noChangeAspect="1"/>
           </p:cNvPicPr>
@@ -15171,7 +15183,7 @@
                   <a:schemeClr val="bg2"/>
                 </a:solidFill>
               </a:rPr>
-              <a:t>Tres pasos, una y otra vez: la tarima, la cantidad, el rack.</a:t>
+              <a:t>Tres pasos, una y otra vez: el rack, la tarima, la cantidad.</a:t>
             </a:r>
             <a:endParaRPr lang="en-US" sz="2400" dirty="0"/>
           </a:p>
@@ -15280,7 +15292,7 @@
       </p:sp>
       <p:pic>
         <p:nvPicPr>
-          <p:cNvPr id="4" name="screen next-bin" descr="/tmp/claude-0/-home-user-physical-inv-app/306c8cb8-d35a-5682-9463-1e29ddfdbc42/scratchpad/wt-film/docs/training/shots/es/05-next-bin.png">    </p:cNvPr>
+          <p:cNvPr id="4" name="screen next-bin" descr="/home/user/physical-inv-app/docs/training/shots/es/05-next-bin.png">    </p:cNvPr>
           <p:cNvPicPr>
             <a:picLocks noChangeAspect="1"/>
           </p:cNvPicPr>
